--- a/@Materi Kuliah/Materi_Analisis_Image/Presentasi_Analisis_Image_Profesional_dari_HTML.pptx
+++ b/@Materi Kuliah/Materi_Analisis_Image/Presentasi_Analisis_Image_Profesional_dari_HTML.pptx
@@ -2,131 +2,36 @@
 <file path=ppt/presentation.xml><?xml version="1.0" encoding="utf-8"?>
 <p:presentation xmlns:p="http://schemas.openxmlformats.org/presentationml/2006/main">
   <p:sldMasterIdLst>
-    <p:sldMasterId xmlns:r="http://schemas.openxmlformats.org/officeDocument/2006/relationships" id="2147483648" r:id="Rc838e11a63334eb9"/>
+    <p:sldMasterId xmlns:r="http://schemas.openxmlformats.org/officeDocument/2006/relationships" id="2147483648" r:id="R18bb284ebd1349e2"/>
   </p:sldMasterIdLst>
   <p:notesMasterIdLst>
-    <p:notesMasterId xmlns:r="http://schemas.openxmlformats.org/officeDocument/2006/relationships" r:id="R246b51705db84210"/>
+    <p:notesMasterId xmlns:r="http://schemas.openxmlformats.org/officeDocument/2006/relationships" r:id="R63ce765585c04676"/>
   </p:notesMasterIdLst>
   <p:sldIdLst>
-    <p:sldId xmlns:r="http://schemas.openxmlformats.org/officeDocument/2006/relationships" id="256" r:id="R23569e599aff426e"/>
-    <p:sldId xmlns:r="http://schemas.openxmlformats.org/officeDocument/2006/relationships" id="257" r:id="Rf112e4412cb74321"/>
-    <p:sldId xmlns:r="http://schemas.openxmlformats.org/officeDocument/2006/relationships" id="258" r:id="R391a1979dea44cfa"/>
-    <p:sldId xmlns:r="http://schemas.openxmlformats.org/officeDocument/2006/relationships" id="259" r:id="R496ddf50799441de"/>
-    <p:sldId xmlns:r="http://schemas.openxmlformats.org/officeDocument/2006/relationships" id="260" r:id="R47d2018791c64ea9"/>
-    <p:sldId xmlns:r="http://schemas.openxmlformats.org/officeDocument/2006/relationships" id="261" r:id="R116aec1927f54428"/>
-    <p:sldId xmlns:r="http://schemas.openxmlformats.org/officeDocument/2006/relationships" id="262" r:id="R6bbdb8ebb0cc45c6"/>
-    <p:sldId xmlns:r="http://schemas.openxmlformats.org/officeDocument/2006/relationships" id="263" r:id="R428394e28c954736"/>
-    <p:sldId xmlns:r="http://schemas.openxmlformats.org/officeDocument/2006/relationships" id="264" r:id="R3a4c8512cc574132"/>
-    <p:sldId xmlns:r="http://schemas.openxmlformats.org/officeDocument/2006/relationships" id="265" r:id="Rf49ff07bed854045"/>
-    <p:sldId xmlns:r="http://schemas.openxmlformats.org/officeDocument/2006/relationships" id="266" r:id="Rc424b5e20ce44cf7"/>
-    <p:sldId xmlns:r="http://schemas.openxmlformats.org/officeDocument/2006/relationships" id="267" r:id="R8d2cf5245d9a40c9"/>
-    <p:sldId xmlns:r="http://schemas.openxmlformats.org/officeDocument/2006/relationships" id="268" r:id="Ra7e8a158e2e841e6"/>
-    <p:sldId xmlns:r="http://schemas.openxmlformats.org/officeDocument/2006/relationships" id="269" r:id="R65de43aa85274c61"/>
-    <p:sldId xmlns:r="http://schemas.openxmlformats.org/officeDocument/2006/relationships" id="270" r:id="R84548cdd06594c2e"/>
-    <p:sldId xmlns:r="http://schemas.openxmlformats.org/officeDocument/2006/relationships" id="271" r:id="Rb4c88a9201b64a2f"/>
-    <p:sldId xmlns:r="http://schemas.openxmlformats.org/officeDocument/2006/relationships" id="272" r:id="Ra358e804eaea4800"/>
-    <p:sldId xmlns:r="http://schemas.openxmlformats.org/officeDocument/2006/relationships" id="273" r:id="R69198eb20f7142aa"/>
-    <p:sldId xmlns:r="http://schemas.openxmlformats.org/officeDocument/2006/relationships" id="274" r:id="R9c0bdfc8afec4c11"/>
-    <p:sldId xmlns:r="http://schemas.openxmlformats.org/officeDocument/2006/relationships" id="275" r:id="R487a224339f8426f"/>
-    <p:sldId xmlns:r="http://schemas.openxmlformats.org/officeDocument/2006/relationships" id="276" r:id="R84fa5ab096bb48aa"/>
+    <p:sldId xmlns:r="http://schemas.openxmlformats.org/officeDocument/2006/relationships" id="256" r:id="R06bb288f34b4484d"/>
+    <p:sldId xmlns:r="http://schemas.openxmlformats.org/officeDocument/2006/relationships" id="257" r:id="R8ff6aa50d4c1433e"/>
+    <p:sldId xmlns:r="http://schemas.openxmlformats.org/officeDocument/2006/relationships" id="258" r:id="R1702704a9c9b4c9e"/>
+    <p:sldId xmlns:r="http://schemas.openxmlformats.org/officeDocument/2006/relationships" id="259" r:id="Rb286e91ff2a446a9"/>
+    <p:sldId xmlns:r="http://schemas.openxmlformats.org/officeDocument/2006/relationships" id="260" r:id="Rb1f87ea1871340be"/>
+    <p:sldId xmlns:r="http://schemas.openxmlformats.org/officeDocument/2006/relationships" id="261" r:id="Re86bf33667cc4de1"/>
+    <p:sldId xmlns:r="http://schemas.openxmlformats.org/officeDocument/2006/relationships" id="262" r:id="R8e5e38fc5f5641ac"/>
+    <p:sldId xmlns:r="http://schemas.openxmlformats.org/officeDocument/2006/relationships" id="263" r:id="R05ddb154b02c4ac9"/>
+    <p:sldId xmlns:r="http://schemas.openxmlformats.org/officeDocument/2006/relationships" id="264" r:id="Rfcd54c9249694bff"/>
+    <p:sldId xmlns:r="http://schemas.openxmlformats.org/officeDocument/2006/relationships" id="265" r:id="R13459c6ddfa14c9b"/>
+    <p:sldId xmlns:r="http://schemas.openxmlformats.org/officeDocument/2006/relationships" id="266" r:id="R9d7e0164b36643f6"/>
+    <p:sldId xmlns:r="http://schemas.openxmlformats.org/officeDocument/2006/relationships" id="267" r:id="R2f85cb987d1a475d"/>
+    <p:sldId xmlns:r="http://schemas.openxmlformats.org/officeDocument/2006/relationships" id="268" r:id="R71fdcdc4086a4dc4"/>
+    <p:sldId xmlns:r="http://schemas.openxmlformats.org/officeDocument/2006/relationships" id="269" r:id="R89184375380a44e6"/>
+    <p:sldId xmlns:r="http://schemas.openxmlformats.org/officeDocument/2006/relationships" id="270" r:id="R91db1618ecf846bd"/>
+    <p:sldId xmlns:r="http://schemas.openxmlformats.org/officeDocument/2006/relationships" id="271" r:id="R12c23a3877c847a3"/>
+    <p:sldId xmlns:r="http://schemas.openxmlformats.org/officeDocument/2006/relationships" id="272" r:id="R66a9e33e191f4552"/>
+    <p:sldId xmlns:r="http://schemas.openxmlformats.org/officeDocument/2006/relationships" id="273" r:id="R9b9cd867a1804aae"/>
+    <p:sldId xmlns:r="http://schemas.openxmlformats.org/officeDocument/2006/relationships" id="274" r:id="R2c6b1ed46d304b4a"/>
+    <p:sldId xmlns:r="http://schemas.openxmlformats.org/officeDocument/2006/relationships" id="275" r:id="R9a792a1ae5f3485b"/>
+    <p:sldId xmlns:r="http://schemas.openxmlformats.org/officeDocument/2006/relationships" id="276" r:id="R0b9dc11caa4e4653"/>
   </p:sldIdLst>
   <p:sldSz cx="12192000" cy="6858000"/>
   <p:notesSz cx="6858000" cy="9144000"/>
-  <p:defaultTextStyle>
-    <a:defPPr xmlns:a="http://schemas.openxmlformats.org/drawingml/2006/main">
-      <a:defRPr lang="en-US"/>
-    </a:defPPr>
-    <a:lvl1pPr xmlns:a="http://schemas.openxmlformats.org/drawingml/2006/main" marL="0" indent="0" algn="l" defTabSz="914400">
-      <a:defRPr sz="1800" kern="1200">
-        <a:solidFill>
-          <a:schemeClr val="tx1"/>
-        </a:solidFill>
-        <a:latin typeface="+mn-lt"/>
-        <a:ea typeface="+mn-ea"/>
-        <a:cs typeface="+mn-cs"/>
-      </a:defRPr>
-    </a:lvl1pPr>
-    <a:lvl2pPr xmlns:a="http://schemas.openxmlformats.org/drawingml/2006/main" marL="457200" indent="0" algn="l" defTabSz="914400">
-      <a:defRPr sz="1800" kern="1200">
-        <a:solidFill>
-          <a:schemeClr val="tx1"/>
-        </a:solidFill>
-        <a:latin typeface="+mn-lt"/>
-        <a:ea typeface="+mn-ea"/>
-        <a:cs typeface="+mn-cs"/>
-      </a:defRPr>
-    </a:lvl2pPr>
-    <a:lvl3pPr xmlns:a="http://schemas.openxmlformats.org/drawingml/2006/main" marL="914400" indent="0" algn="l" defTabSz="914400">
-      <a:defRPr sz="1800" kern="1200">
-        <a:solidFill>
-          <a:schemeClr val="tx1"/>
-        </a:solidFill>
-        <a:latin typeface="+mn-lt"/>
-        <a:ea typeface="+mn-ea"/>
-        <a:cs typeface="+mn-cs"/>
-      </a:defRPr>
-    </a:lvl3pPr>
-    <a:lvl4pPr xmlns:a="http://schemas.openxmlformats.org/drawingml/2006/main" marL="1371600" indent="0" algn="l" defTabSz="914400">
-      <a:defRPr sz="1800" kern="1200">
-        <a:solidFill>
-          <a:schemeClr val="tx1"/>
-        </a:solidFill>
-        <a:latin typeface="+mn-lt"/>
-        <a:ea typeface="+mn-ea"/>
-        <a:cs typeface="+mn-cs"/>
-      </a:defRPr>
-    </a:lvl4pPr>
-    <a:lvl5pPr xmlns:a="http://schemas.openxmlformats.org/drawingml/2006/main" marL="1828800" indent="0" algn="l" defTabSz="914400">
-      <a:defRPr sz="1800" kern="1200">
-        <a:solidFill>
-          <a:schemeClr val="tx1"/>
-        </a:solidFill>
-        <a:latin typeface="+mn-lt"/>
-        <a:ea typeface="+mn-ea"/>
-        <a:cs typeface="+mn-cs"/>
-      </a:defRPr>
-    </a:lvl5pPr>
-    <a:lvl6pPr xmlns:a="http://schemas.openxmlformats.org/drawingml/2006/main" marL="2286000" indent="0" algn="l" defTabSz="914400">
-      <a:defRPr sz="1800" kern="1200">
-        <a:solidFill>
-          <a:schemeClr val="tx1"/>
-        </a:solidFill>
-        <a:latin typeface="+mn-lt"/>
-        <a:ea typeface="+mn-ea"/>
-        <a:cs typeface="+mn-cs"/>
-      </a:defRPr>
-    </a:lvl6pPr>
-    <a:lvl7pPr xmlns:a="http://schemas.openxmlformats.org/drawingml/2006/main" marL="2743200" indent="0" algn="l" defTabSz="914400">
-      <a:defRPr sz="1800" kern="1200">
-        <a:solidFill>
-          <a:schemeClr val="tx1"/>
-        </a:solidFill>
-        <a:latin typeface="+mn-lt"/>
-        <a:ea typeface="+mn-ea"/>
-        <a:cs typeface="+mn-cs"/>
-      </a:defRPr>
-    </a:lvl7pPr>
-    <a:lvl8pPr xmlns:a="http://schemas.openxmlformats.org/drawingml/2006/main" marL="3200400" indent="0" algn="l" defTabSz="914400">
-      <a:defRPr sz="1800" kern="1200">
-        <a:solidFill>
-          <a:schemeClr val="tx1"/>
-        </a:solidFill>
-        <a:latin typeface="+mn-lt"/>
-        <a:ea typeface="+mn-ea"/>
-        <a:cs typeface="+mn-cs"/>
-      </a:defRPr>
-    </a:lvl8pPr>
-    <a:lvl9pPr xmlns:a="http://schemas.openxmlformats.org/drawingml/2006/main" marL="3657600" indent="0" algn="l" defTabSz="914400">
-      <a:defRPr sz="1800" kern="1200">
-        <a:solidFill>
-          <a:schemeClr val="tx1"/>
-        </a:solidFill>
-        <a:latin typeface="+mn-lt"/>
-        <a:ea typeface="+mn-ea"/>
-        <a:cs typeface="+mn-cs"/>
-      </a:defRPr>
-    </a:lvl9pPr>
-  </p:defaultTextStyle>
 </p:presentation>
 </file>
 
@@ -1453,7 +1358,26 @@
         <p:txBody>
           <a:bodyPr xmlns:a="http://schemas.openxmlformats.org/drawingml/2006/main"/>
           <a:lstStyle xmlns:a="http://schemas.openxmlformats.org/drawingml/2006/main"/>
-          <a:p xmlns:a="http://schemas.openxmlformats.org/drawingml/2006/main"/>
+          <a:p xmlns:a="http://schemas.openxmlformats.org/drawingml/2006/main">
+            <a:r>
+              <a:t>[Sources]</a:t>
+            </a:r>
+          </a:p>
+          <a:p xmlns:a="http://schemas.openxmlformats.org/drawingml/2006/main">
+            <a:r>
+              <a:t>- RPS mata kuliah Revisi AI 2026, Program Studi S2 Statistika Terapan FMIPA Universitas Padjadjaran.</a:t>
+            </a:r>
+          </a:p>
+          <a:p xmlns:a="http://schemas.openxmlformats.org/drawingml/2006/main">
+            <a:r>
+              <a:t>[/Sources]</a:t>
+            </a:r>
+          </a:p>
+          <a:p xmlns:a="http://schemas.openxmlformats.org/drawingml/2006/main">
+            <a:r>
+              <a:t>Penutup: CPL tetap. AI adalah akselerator ketercapaian CPMK/Sub-CPMK, bukan pengganti penalaran statistika. Tekankan kewajiban prompt log ringkas, sumber, kode/notebook reproducible, validasi, dan audit trail.</a:t>
+            </a:r>
+          </a:p>
         </p:txBody>
       </p:sp>
       <p:sp>
@@ -2010,8 +1934,8 @@
   </p:cSld>
   <p:clrMap bg1="lt1" tx1="dk1" bg2="lt2" tx2="dk2" accent1="accent1" accent2="accent2" accent3="accent3" accent4="accent4" accent5="accent5" accent6="accent6" hlink="hlink" folHlink="folHlink"/>
   <p:sldLayoutIdLst>
-    <p:sldLayoutId xmlns:r="http://schemas.openxmlformats.org/officeDocument/2006/relationships" id="2147483649" r:id="R189789e8c4c045bf"/>
-    <p:sldLayoutId xmlns:r="http://schemas.openxmlformats.org/officeDocument/2006/relationships" id="2147483650" r:id="R22461b2898304104"/>
+    <p:sldLayoutId xmlns:r="http://schemas.openxmlformats.org/officeDocument/2006/relationships" id="2147483649" r:id="R0b92b493ff6243f0"/>
+    <p:sldLayoutId xmlns:r="http://schemas.openxmlformats.org/officeDocument/2006/relationships" id="2147483650" r:id="Rb3612416b5c94be0"/>
   </p:sldLayoutIdLst>
   <p:hf sldNum="0" hdr="0" ftr="0" dt="0"/>
   <p:txStyles>
@@ -2577,7 +2501,7 @@
           <p:nvPr/>
         </p:nvPicPr>
         <p:blipFill>
-          <a:blip xmlns:r="http://schemas.openxmlformats.org/officeDocument/2006/relationships" xmlns:a="http://schemas.openxmlformats.org/drawingml/2006/main" r:embed="R0dbb7f31c05540f8"/>
+          <a:blip xmlns:r="http://schemas.openxmlformats.org/officeDocument/2006/relationships" xmlns:a="http://schemas.openxmlformats.org/drawingml/2006/main" r:embed="R709f6feca43c477b"/>
           <a:stretch xmlns:a="http://schemas.openxmlformats.org/drawingml/2006/main">
             <a:fillRect l="0" t="0" r="0" b="0"/>
           </a:stretch>
@@ -2723,7 +2647,7 @@
           <p:nvPr/>
         </p:nvPicPr>
         <p:blipFill>
-          <a:blip xmlns:r="http://schemas.openxmlformats.org/officeDocument/2006/relationships" xmlns:a="http://schemas.openxmlformats.org/drawingml/2006/main" r:embed="R5fd7b7ea72c94497"/>
+          <a:blip xmlns:r="http://schemas.openxmlformats.org/officeDocument/2006/relationships" xmlns:a="http://schemas.openxmlformats.org/drawingml/2006/main" r:embed="R0ab6c26c64964749"/>
           <a:stretch xmlns:a="http://schemas.openxmlformats.org/drawingml/2006/main">
             <a:fillRect l="0" t="0" r="0" b="0"/>
           </a:stretch>
@@ -3329,7 +3253,7 @@
           <p:nvPr/>
         </p:nvPicPr>
         <p:blipFill>
-          <a:blip xmlns:r="http://schemas.openxmlformats.org/officeDocument/2006/relationships" xmlns:a="http://schemas.openxmlformats.org/drawingml/2006/main" r:embed="R83e99ca925d04ddf"/>
+          <a:blip xmlns:r="http://schemas.openxmlformats.org/officeDocument/2006/relationships" xmlns:a="http://schemas.openxmlformats.org/drawingml/2006/main" r:embed="R91b35d4b9ba24b44"/>
           <a:stretch xmlns:a="http://schemas.openxmlformats.org/drawingml/2006/main">
             <a:fillRect l="0" t="0" r="0" b="0"/>
           </a:stretch>
@@ -5479,7 +5403,7 @@
           <p:nvPr/>
         </p:nvPicPr>
         <p:blipFill>
-          <a:blip xmlns:r="http://schemas.openxmlformats.org/officeDocument/2006/relationships" xmlns:a="http://schemas.openxmlformats.org/drawingml/2006/main" r:embed="Rdd963981ea814c47"/>
+          <a:blip xmlns:r="http://schemas.openxmlformats.org/officeDocument/2006/relationships" xmlns:a="http://schemas.openxmlformats.org/drawingml/2006/main" r:embed="R1d54668350374939"/>
           <a:stretch xmlns:a="http://schemas.openxmlformats.org/drawingml/2006/main">
             <a:fillRect l="0" t="0" r="0" b="0"/>
           </a:stretch>
@@ -5758,7 +5682,7 @@
           <p:nvPr/>
         </p:nvPicPr>
         <p:blipFill>
-          <a:blip xmlns:r="http://schemas.openxmlformats.org/officeDocument/2006/relationships" xmlns:a="http://schemas.openxmlformats.org/drawingml/2006/main" r:embed="R963a528e14e74f40"/>
+          <a:blip xmlns:r="http://schemas.openxmlformats.org/officeDocument/2006/relationships" xmlns:a="http://schemas.openxmlformats.org/drawingml/2006/main" r:embed="Ra32ffaa7fe714389"/>
           <a:stretch xmlns:a="http://schemas.openxmlformats.org/drawingml/2006/main">
             <a:fillRect l="0" t="0" r="0" b="0"/>
           </a:stretch>
@@ -7292,7 +7216,7 @@
           <p:nvPr/>
         </p:nvPicPr>
         <p:blipFill>
-          <a:blip xmlns:r="http://schemas.openxmlformats.org/officeDocument/2006/relationships" xmlns:a="http://schemas.openxmlformats.org/drawingml/2006/main" r:embed="R6c5d80ccb0004b31"/>
+          <a:blip xmlns:r="http://schemas.openxmlformats.org/officeDocument/2006/relationships" xmlns:a="http://schemas.openxmlformats.org/drawingml/2006/main" r:embed="R4467b5593af14d56"/>
           <a:stretch xmlns:a="http://schemas.openxmlformats.org/drawingml/2006/main">
             <a:fillRect l="0" t="0" r="0" b="0"/>
           </a:stretch>
@@ -8461,7 +8385,7 @@
           <p:nvPr/>
         </p:nvPicPr>
         <p:blipFill>
-          <a:blip xmlns:r="http://schemas.openxmlformats.org/officeDocument/2006/relationships" xmlns:a="http://schemas.openxmlformats.org/drawingml/2006/main" r:embed="Rb23199528505433d"/>
+          <a:blip xmlns:r="http://schemas.openxmlformats.org/officeDocument/2006/relationships" xmlns:a="http://schemas.openxmlformats.org/drawingml/2006/main" r:embed="R32e92602c14d4cb2"/>
           <a:stretch xmlns:a="http://schemas.openxmlformats.org/drawingml/2006/main">
             <a:fillRect l="0" t="0" r="0" b="0"/>
           </a:stretch>
@@ -9688,7 +9612,7 @@
           <p:nvPr/>
         </p:nvPicPr>
         <p:blipFill>
-          <a:blip xmlns:r="http://schemas.openxmlformats.org/officeDocument/2006/relationships" xmlns:a="http://schemas.openxmlformats.org/drawingml/2006/main" r:embed="R52e9b6cae05d4eb0"/>
+          <a:blip xmlns:r="http://schemas.openxmlformats.org/officeDocument/2006/relationships" xmlns:a="http://schemas.openxmlformats.org/drawingml/2006/main" r:embed="R75c559048a0a44f5"/>
           <a:stretch xmlns:a="http://schemas.openxmlformats.org/drawingml/2006/main">
             <a:fillRect l="0" t="0" r="0" b="0"/>
           </a:stretch>
@@ -10893,7 +10817,7 @@
           <p:nvPr/>
         </p:nvPicPr>
         <p:blipFill>
-          <a:blip xmlns:r="http://schemas.openxmlformats.org/officeDocument/2006/relationships" xmlns:a="http://schemas.openxmlformats.org/drawingml/2006/main" r:embed="R4443e28ac4d04ba1"/>
+          <a:blip xmlns:r="http://schemas.openxmlformats.org/officeDocument/2006/relationships" xmlns:a="http://schemas.openxmlformats.org/drawingml/2006/main" r:embed="R92dc18a7af5d48b9"/>
           <a:stretch xmlns:a="http://schemas.openxmlformats.org/drawingml/2006/main">
             <a:fillRect l="0" t="0" r="0" b="0"/>
           </a:stretch>
@@ -11172,7 +11096,7 @@
           <p:nvPr/>
         </p:nvPicPr>
         <p:blipFill>
-          <a:blip xmlns:r="http://schemas.openxmlformats.org/officeDocument/2006/relationships" xmlns:a="http://schemas.openxmlformats.org/drawingml/2006/main" r:embed="Ree1f7ac42a4c487b"/>
+          <a:blip xmlns:r="http://schemas.openxmlformats.org/officeDocument/2006/relationships" xmlns:a="http://schemas.openxmlformats.org/drawingml/2006/main" r:embed="Rddd5d1b603f44583"/>
           <a:stretch xmlns:a="http://schemas.openxmlformats.org/drawingml/2006/main">
             <a:fillRect l="0" t="0" r="0" b="0"/>
           </a:stretch>
@@ -12717,7 +12641,7 @@
           <p:nvPr/>
         </p:nvPicPr>
         <p:blipFill>
-          <a:blip xmlns:r="http://schemas.openxmlformats.org/officeDocument/2006/relationships" xmlns:a="http://schemas.openxmlformats.org/drawingml/2006/main" r:embed="R0d12464017444071"/>
+          <a:blip xmlns:r="http://schemas.openxmlformats.org/officeDocument/2006/relationships" xmlns:a="http://schemas.openxmlformats.org/drawingml/2006/main" r:embed="R650b1eb322d44d27"/>
           <a:stretch xmlns:a="http://schemas.openxmlformats.org/drawingml/2006/main">
             <a:fillRect l="0" t="0" r="0" b="0"/>
           </a:stretch>
@@ -14734,7 +14658,7 @@
           <p:nvPr/>
         </p:nvPicPr>
         <p:blipFill>
-          <a:blip xmlns:r="http://schemas.openxmlformats.org/officeDocument/2006/relationships" xmlns:a="http://schemas.openxmlformats.org/drawingml/2006/main" r:embed="R35d2c46be516413d"/>
+          <a:blip xmlns:r="http://schemas.openxmlformats.org/officeDocument/2006/relationships" xmlns:a="http://schemas.openxmlformats.org/drawingml/2006/main" r:embed="R3a71782d28874e76"/>
           <a:stretch xmlns:a="http://schemas.openxmlformats.org/drawingml/2006/main">
             <a:fillRect l="0" t="0" r="0" b="0"/>
           </a:stretch>
@@ -15961,7 +15885,7 @@
           <p:nvPr/>
         </p:nvPicPr>
         <p:blipFill>
-          <a:blip xmlns:r="http://schemas.openxmlformats.org/officeDocument/2006/relationships" xmlns:a="http://schemas.openxmlformats.org/drawingml/2006/main" r:embed="R8fd71510a64a422e"/>
+          <a:blip xmlns:r="http://schemas.openxmlformats.org/officeDocument/2006/relationships" xmlns:a="http://schemas.openxmlformats.org/drawingml/2006/main" r:embed="R3227407eed8c4944"/>
           <a:stretch xmlns:a="http://schemas.openxmlformats.org/drawingml/2006/main">
             <a:fillRect l="0" t="0" r="0" b="0"/>
           </a:stretch>
@@ -17102,7 +17026,7 @@
           <p:nvPr/>
         </p:nvPicPr>
         <p:blipFill>
-          <a:blip xmlns:r="http://schemas.openxmlformats.org/officeDocument/2006/relationships" xmlns:a="http://schemas.openxmlformats.org/drawingml/2006/main" r:embed="R097b8857788d4682"/>
+          <a:blip xmlns:r="http://schemas.openxmlformats.org/officeDocument/2006/relationships" xmlns:a="http://schemas.openxmlformats.org/drawingml/2006/main" r:embed="R818ac3bc7c7c4467"/>
           <a:stretch xmlns:a="http://schemas.openxmlformats.org/drawingml/2006/main">
             <a:fillRect l="0" t="0" r="0" b="0"/>
           </a:stretch>
@@ -18567,7 +18491,7 @@
           <p:nvPr/>
         </p:nvPicPr>
         <p:blipFill>
-          <a:blip xmlns:r="http://schemas.openxmlformats.org/officeDocument/2006/relationships" xmlns:a="http://schemas.openxmlformats.org/drawingml/2006/main" r:embed="R28af0492fe474a54"/>
+          <a:blip xmlns:r="http://schemas.openxmlformats.org/officeDocument/2006/relationships" xmlns:a="http://schemas.openxmlformats.org/drawingml/2006/main" r:embed="R24d18a350b2248ec"/>
           <a:stretch xmlns:a="http://schemas.openxmlformats.org/drawingml/2006/main">
             <a:fillRect l="0" t="0" r="0" b="0"/>
           </a:stretch>
@@ -18713,7 +18637,7 @@
           <p:nvPr/>
         </p:nvPicPr>
         <p:blipFill>
-          <a:blip xmlns:r="http://schemas.openxmlformats.org/officeDocument/2006/relationships" xmlns:a="http://schemas.openxmlformats.org/drawingml/2006/main" r:embed="R78a8f9c309694044"/>
+          <a:blip xmlns:r="http://schemas.openxmlformats.org/officeDocument/2006/relationships" xmlns:a="http://schemas.openxmlformats.org/drawingml/2006/main" r:embed="R1ac5447980e54bf4"/>
           <a:stretch xmlns:a="http://schemas.openxmlformats.org/drawingml/2006/main">
             <a:fillRect l="0" t="0" r="0" b="0"/>
           </a:stretch>
@@ -18817,7 +18741,7 @@
                 <a:ea typeface="Aptos Display"/>
                 <a:cs typeface="Aptos Display"/>
               </a:rPr>
-              <a:t>Dari data menuju</a:t>
+              <a:t>AI mempercepat proses,</a:t>
             </a:r>
           </a:p>
           <a:p xmlns:a="http://schemas.openxmlformats.org/drawingml/2006/main">
@@ -18833,7 +18757,7 @@
                 <a:ea typeface="Aptos Display"/>
                 <a:cs typeface="Aptos Display"/>
               </a:rPr>
-              <a:t>keputusan yang dapat diuji</a:t>
+              <a:t>penalaran tetap memimpin</a:t>
             </a:r>
           </a:p>
         </p:txBody>
@@ -18900,7 +18824,7 @@
         </p:spPr>
         <p:txBody>
           <a:bodyPr xmlns:a="http://schemas.openxmlformats.org/drawingml/2006/main" wrap="square" lIns="635" tIns="635" rIns="635" bIns="635" anchor="t">
-            <a:normAutofit fontScale="100000"/>
+            <a:normAutofit fontScale="93620"/>
           </a:bodyPr>
           <a:lstStyle xmlns:a="http://schemas.openxmlformats.org/drawingml/2006/main"/>
           <a:p xmlns:a="http://schemas.openxmlformats.org/drawingml/2006/main">
@@ -18916,7 +18840,7 @@
                 <a:ea typeface="Aptos"/>
                 <a:cs typeface="Aptos"/>
               </a:rPr>
-              <a:t>Analisis Image menghubungkan teori, data, metode, validasi, dan komunikasi untuk menghasilkan keputusan yang sahih, dapat direplikasi, dan bertanggung jawab.</a:t>
+              <a:t>Analisis Image memadukan teori, data, komputasi, validasi, dan komunikasi. AI mempercepat eksplorasi dan pemeriksaan awal; mahasiswa tetap memverifikasi asumsi, kode, hasil numerik, ketidakpastian, sumber, dan dampak sebelum mengambil keputusan.</a:t>
             </a:r>
           </a:p>
         </p:txBody>
@@ -19086,7 +19010,7 @@
           <p:nvPr/>
         </p:nvPicPr>
         <p:blipFill>
-          <a:blip xmlns:r="http://schemas.openxmlformats.org/officeDocument/2006/relationships" xmlns:a="http://schemas.openxmlformats.org/drawingml/2006/main" r:embed="R031e8d6b82b748d2"/>
+          <a:blip xmlns:r="http://schemas.openxmlformats.org/officeDocument/2006/relationships" xmlns:a="http://schemas.openxmlformats.org/drawingml/2006/main" r:embed="Rd4a428e9459546d4"/>
           <a:stretch xmlns:a="http://schemas.openxmlformats.org/drawingml/2006/main">
             <a:fillRect l="0" t="0" r="0" b="0"/>
           </a:stretch>
@@ -20217,7 +20141,7 @@
           <p:nvPr/>
         </p:nvPicPr>
         <p:blipFill>
-          <a:blip xmlns:r="http://schemas.openxmlformats.org/officeDocument/2006/relationships" xmlns:a="http://schemas.openxmlformats.org/drawingml/2006/main" r:embed="Rb32879d465f74d60"/>
+          <a:blip xmlns:r="http://schemas.openxmlformats.org/officeDocument/2006/relationships" xmlns:a="http://schemas.openxmlformats.org/drawingml/2006/main" r:embed="R98dac5004b6e419b"/>
           <a:stretch xmlns:a="http://schemas.openxmlformats.org/drawingml/2006/main">
             <a:fillRect l="0" t="0" r="0" b="0"/>
           </a:stretch>
@@ -22321,7 +22245,7 @@
           <p:nvPr/>
         </p:nvPicPr>
         <p:blipFill>
-          <a:blip xmlns:r="http://schemas.openxmlformats.org/officeDocument/2006/relationships" xmlns:a="http://schemas.openxmlformats.org/drawingml/2006/main" r:embed="Rb4c95b2fc1384220"/>
+          <a:blip xmlns:r="http://schemas.openxmlformats.org/officeDocument/2006/relationships" xmlns:a="http://schemas.openxmlformats.org/drawingml/2006/main" r:embed="R5cc8ecf0c70b45aa"/>
           <a:stretch xmlns:a="http://schemas.openxmlformats.org/drawingml/2006/main">
             <a:fillRect l="0" t="0" r="0" b="0"/>
           </a:stretch>
@@ -23603,7 +23527,7 @@
           <p:nvPr/>
         </p:nvPicPr>
         <p:blipFill>
-          <a:blip xmlns:r="http://schemas.openxmlformats.org/officeDocument/2006/relationships" xmlns:a="http://schemas.openxmlformats.org/drawingml/2006/main" r:embed="R2590eb60d5824dfe"/>
+          <a:blip xmlns:r="http://schemas.openxmlformats.org/officeDocument/2006/relationships" xmlns:a="http://schemas.openxmlformats.org/drawingml/2006/main" r:embed="R112f30920d5c49ba"/>
           <a:stretch xmlns:a="http://schemas.openxmlformats.org/drawingml/2006/main">
             <a:fillRect l="0" t="0" r="0" b="0"/>
           </a:stretch>
@@ -23882,7 +23806,7 @@
           <p:nvPr/>
         </p:nvPicPr>
         <p:blipFill>
-          <a:blip xmlns:r="http://schemas.openxmlformats.org/officeDocument/2006/relationships" xmlns:a="http://schemas.openxmlformats.org/drawingml/2006/main" r:embed="Re4deb67498334f13"/>
+          <a:blip xmlns:r="http://schemas.openxmlformats.org/officeDocument/2006/relationships" xmlns:a="http://schemas.openxmlformats.org/drawingml/2006/main" r:embed="R58f5698340dc4ebb"/>
           <a:stretch xmlns:a="http://schemas.openxmlformats.org/drawingml/2006/main">
             <a:fillRect l="0" t="0" r="0" b="0"/>
           </a:stretch>
@@ -25962,7 +25886,7 @@
           <p:nvPr/>
         </p:nvPicPr>
         <p:blipFill>
-          <a:blip xmlns:r="http://schemas.openxmlformats.org/officeDocument/2006/relationships" xmlns:a="http://schemas.openxmlformats.org/drawingml/2006/main" r:embed="Rdff043dbe37843db"/>
+          <a:blip xmlns:r="http://schemas.openxmlformats.org/officeDocument/2006/relationships" xmlns:a="http://schemas.openxmlformats.org/drawingml/2006/main" r:embed="R4d884cd011d441b5"/>
           <a:stretch xmlns:a="http://schemas.openxmlformats.org/drawingml/2006/main">
             <a:fillRect l="0" t="0" r="0" b="0"/>
           </a:stretch>
@@ -27375,7 +27299,7 @@
           <p:nvPr/>
         </p:nvPicPr>
         <p:blipFill>
-          <a:blip xmlns:r="http://schemas.openxmlformats.org/officeDocument/2006/relationships" xmlns:a="http://schemas.openxmlformats.org/drawingml/2006/main" r:embed="R9070270dfcc0463a"/>
+          <a:blip xmlns:r="http://schemas.openxmlformats.org/officeDocument/2006/relationships" xmlns:a="http://schemas.openxmlformats.org/drawingml/2006/main" r:embed="R3108ecb8aac3443d"/>
           <a:stretch xmlns:a="http://schemas.openxmlformats.org/drawingml/2006/main">
             <a:fillRect l="0" t="0" r="0" b="0"/>
           </a:stretch>
